--- a/poc-egress-kuadrant/poc-egreso-kuadrant-tecnica-2026-08.pptx
+++ b/poc-egress-kuadrant/poc-egreso-kuadrant-tecnica-2026-08.pptx
@@ -2860,7 +2860,7 @@
                 <a:ea typeface="Calibri" pitchFamily="34" charset="-122"/>
                 <a:cs typeface="Calibri" pitchFamily="34" charset="-120"/>
               </a:rPr>
-              <a:t>1 · Pedido a redes para abrir el camino a la VPC</a:t>
+              <a:t>1 · Sincronizar la clave pública en el cluster destino</a:t>
             </a:r>
             <a:endParaRPr lang="en-US" sz="1600" dirty="0"/>
           </a:p>
@@ -3013,7 +3013,7 @@
                 <a:ea typeface="Calibri" pitchFamily="34" charset="-122"/>
                 <a:cs typeface="Calibri" pitchFamily="34" charset="-120"/>
               </a:rPr>
-              <a:t>Detalle: README.md · RESUMEN.md · HALLAZGOS.md</a:t>
+              <a:t>Detalle: RESUMEN.md · HALLAZGOS.md · pedido-jwks-eks.md</a:t>
             </a:r>
             <a:endParaRPr lang="en-US" sz="1300" dirty="0"/>
           </a:p>
@@ -8209,7 +8209,7 @@
                 <a:ea typeface="Cambria" pitchFamily="34" charset="-122"/>
                 <a:cs typeface="Cambria" pitchFamily="34" charset="-120"/>
               </a:rPr>
-              <a:t>Red real hacia el destino</a:t>
+              <a:t>El tramo contra el destino real</a:t>
             </a:r>
             <a:endParaRPr lang="en-US" sz="1700" dirty="0"/>
           </a:p>
@@ -8251,7 +8251,7 @@
                 <a:ea typeface="Calibri" pitchFamily="34" charset="-122"/>
                 <a:cs typeface="Calibri" pitchFamily="34" charset="-120"/>
               </a:rPr>
-              <a:t>No hay camino a la VPC: el DNS resuelve y no hay proxy, pero el puerto 443 da timeout desde el pod y desde el bastión. Es un pedido a redes.</a:t>
+              <a:t>El cluster destino está alcanzable y su política enforceando, pero la clave pública que tiene pineada quedó de una versión anterior y todavía rechaza los tokens. Falta sincronizarla; del lado origen no cambia nada.</a:t>
             </a:r>
             <a:endParaRPr lang="en-US" sz="1350" dirty="0"/>
           </a:p>

--- a/poc-egress-kuadrant/poc-egreso-kuadrant-tecnica-2026-08.pptx
+++ b/poc-egress-kuadrant/poc-egreso-kuadrant-tecnica-2026-08.pptx
@@ -2518,7 +2518,7 @@
                 <a:ea typeface="Cambria" pitchFamily="34" charset="-122"/>
                 <a:cs typeface="Cambria" pitchFamily="34" charset="-120"/>
               </a:rPr>
-              <a:t>Red hacia el destino</a:t>
+              <a:t>Subdominio privado y tráfico east-west</a:t>
             </a:r>
             <a:endParaRPr lang="en-US" sz="1800" dirty="0"/>
           </a:p>
@@ -2560,7 +2560,7 @@
                 <a:ea typeface="Calibri" pitchFamily="34" charset="-122"/>
                 <a:cs typeface="Calibri" pitchFamily="34" charset="-120"/>
               </a:rPr>
-              <a:t>Bloqueante para cualquier prueba real. Habilitar el puerto 443 desde la subred de workers, o fijar una IP de egreso.</a:t>
+              <a:t>Hoy el salto usa la zona de publicación de aplicaciones, con nombres de laboratorio. Hace falta una zona interna dedicada al tráfico entre clusters: convención de nombres, emisión de certificados y resolución desde CoreDNS.</a:t>
             </a:r>
             <a:endParaRPr lang="en-US" sz="1400" dirty="0"/>
           </a:p>
@@ -2663,7 +2663,7 @@
                 <a:ea typeface="Cambria" pitchFamily="34" charset="-122"/>
                 <a:cs typeface="Cambria" pitchFamily="34" charset="-120"/>
               </a:rPr>
-              <a:t>Rotación de clave y observabilidad</a:t>
+              <a:t>Rotación, audiencia desacoplada y observabilidad</a:t>
             </a:r>
             <a:endParaRPr lang="en-US" sz="1800" dirty="0"/>
           </a:p>
@@ -2705,7 +2705,7 @@
                 <a:ea typeface="Calibri" pitchFamily="34" charset="-122"/>
                 <a:cs typeface="Calibri" pitchFamily="34" charset="-120"/>
               </a:rPr>
-              <a:t>Un identificador de audiencia por destino, rotación sin ventana, y métricas por backend — que además son el criterio para avanzar de fase.</a:t>
+              <a:t>Hoy la audiencia del token ES el FQDN, así que renombrar el dominio rompe el contrato. Va junto con el punto 3. Más rotación sin ventana y métricas por backend.</a:t>
             </a:r>
             <a:endParaRPr lang="en-US" sz="1400" dirty="0"/>
           </a:p>
